--- a/Report/Report_1029.pptx
+++ b/Report/Report_1029.pptx
@@ -3632,11 +3632,15 @@
         <p:nvGrpSpPr>
           <p:cNvPr id="20" name="组合 19"/>
           <p:cNvGrpSpPr/>
-          <p:nvPr/>
+          <p:nvPr>
+            <p:custDataLst>
+              <p:tags r:id="rId1"/>
+            </p:custDataLst>
+          </p:nvPr>
         </p:nvGrpSpPr>
         <p:grpSpPr>
           <a:xfrm>
-            <a:off x="18415" y="1170305"/>
+            <a:off x="18415" y="933450"/>
             <a:ext cx="9144000" cy="3767455"/>
             <a:chOff x="0" y="1470"/>
             <a:chExt cx="14400" cy="5933"/>
@@ -3648,10 +3652,14 @@
             <p:cNvPicPr>
               <a:picLocks noChangeAspect="1"/>
             </p:cNvPicPr>
-            <p:nvPr/>
+            <p:nvPr>
+              <p:custDataLst>
+                <p:tags r:id="rId2"/>
+              </p:custDataLst>
+            </p:nvPr>
           </p:nvPicPr>
           <p:blipFill>
-            <a:blip r:embed="rId1"/>
+            <a:blip r:embed="rId3"/>
             <a:stretch>
               <a:fillRect/>
             </a:stretch>
@@ -3672,10 +3680,14 @@
             <p:cNvPicPr>
               <a:picLocks noChangeAspect="1"/>
             </p:cNvPicPr>
-            <p:nvPr/>
+            <p:nvPr>
+              <p:custDataLst>
+                <p:tags r:id="rId4"/>
+              </p:custDataLst>
+            </p:nvPr>
           </p:nvPicPr>
           <p:blipFill>
-            <a:blip r:embed="rId2"/>
+            <a:blip r:embed="rId5"/>
             <a:srcRect l="11" r="11"/>
             <a:stretch>
               <a:fillRect/>
@@ -3697,10 +3709,14 @@
             <p:cNvPicPr>
               <a:picLocks noChangeAspect="1"/>
             </p:cNvPicPr>
-            <p:nvPr/>
+            <p:nvPr>
+              <p:custDataLst>
+                <p:tags r:id="rId6"/>
+              </p:custDataLst>
+            </p:nvPr>
           </p:nvPicPr>
           <p:blipFill>
-            <a:blip r:embed="rId3"/>
+            <a:blip r:embed="rId7"/>
             <a:srcRect l="23"/>
             <a:stretch>
               <a:fillRect/>
@@ -3720,7 +3736,11 @@
           <p:nvSpPr>
             <p:cNvPr id="17" name="文本框 16"/>
             <p:cNvSpPr txBox="1"/>
-            <p:nvPr/>
+            <p:nvPr>
+              <p:custDataLst>
+                <p:tags r:id="rId8"/>
+              </p:custDataLst>
+            </p:nvPr>
           </p:nvSpPr>
           <p:spPr>
             <a:xfrm>
@@ -3750,7 +3770,11 @@
           <p:nvSpPr>
             <p:cNvPr id="18" name="文本框 17"/>
             <p:cNvSpPr txBox="1"/>
-            <p:nvPr/>
+            <p:nvPr>
+              <p:custDataLst>
+                <p:tags r:id="rId9"/>
+              </p:custDataLst>
+            </p:nvPr>
           </p:nvSpPr>
           <p:spPr>
             <a:xfrm>
@@ -3780,7 +3804,11 @@
           <p:nvSpPr>
             <p:cNvPr id="19" name="文本框 18"/>
             <p:cNvSpPr txBox="1"/>
-            <p:nvPr/>
+            <p:nvPr>
+              <p:custDataLst>
+                <p:tags r:id="rId10"/>
+              </p:custDataLst>
+            </p:nvPr>
           </p:nvSpPr>
           <p:spPr>
             <a:xfrm>
@@ -3815,8 +3843,8 @@
         </p:nvSpPr>
         <p:spPr>
           <a:xfrm>
-            <a:off x="270510" y="5010150"/>
-            <a:ext cx="8606155" cy="731520"/>
+            <a:off x="270510" y="4700905"/>
+            <a:ext cx="8606155" cy="1732915"/>
           </a:xfrm>
           <a:prstGeom prst="rect">
             <a:avLst/>
@@ -3830,71 +3858,71 @@
           </a:ln>
         </p:spPr>
         <p:txBody>
-          <a:bodyPr wrap="square" lIns="25400" tIns="76200" rIns="76200" bIns="25400" rtlCol="0" anchor="t" anchorCtr="0"/>
-          <a:lstStyle/>
-          <a:p>
-            <a:pPr marL="0" indent="0">
-              <a:buNone/>
+          <a:bodyPr wrap="square" lIns="252095" tIns="76200" rIns="76200" bIns="25400" rtlCol="0" anchor="t" anchorCtr="0"/>
+          <a:lstStyle/>
+          <a:p>
+            <a:pPr marL="171450" indent="-171450">
+              <a:lnSpc>
+                <a:spcPct val="140000"/>
+              </a:lnSpc>
+              <a:buFont typeface="Arial" panose="020B0604020202020204" pitchFamily="34" charset="0"/>
+              <a:buChar char="•"/>
             </a:pPr>
             <a:r>
-              <a:rPr lang="zh-CN" altLang="en-US" sz="1200" dirty="0">
-                <a:ea typeface="SimSun" panose="02010600030101010101" pitchFamily="2" charset="-122"/>
-              </a:rPr>
-              <a:t>距离进行了归一化，初始位置为</a:t>
-            </a:r>
-            <a:r>
-              <a:rPr lang="en-US" altLang="zh-CN" sz="1200" dirty="0">
-                <a:ea typeface="SimSun" panose="02010600030101010101" pitchFamily="2" charset="-122"/>
-              </a:rPr>
-              <a:t>1</a:t>
-            </a:r>
-            <a:r>
-              <a:rPr lang="zh-CN" altLang="en-US" sz="1200" dirty="0">
-                <a:ea typeface="SimSun" panose="02010600030101010101" pitchFamily="2" charset="-122"/>
-              </a:rPr>
-              <a:t>，当前位置为</a:t>
-            </a:r>
-            <a:r>
-              <a:rPr lang="en-US" altLang="zh-CN" sz="1200" dirty="0">
-                <a:ea typeface="SimSun" panose="02010600030101010101" pitchFamily="2" charset="-122"/>
-              </a:rPr>
-              <a:t>dt/d0</a:t>
-            </a:r>
-            <a:r>
-              <a:rPr lang="zh-CN" altLang="en-US" sz="1200" dirty="0">
-                <a:ea typeface="SimSun" panose="02010600030101010101" pitchFamily="2" charset="-122"/>
-              </a:rPr>
-              <a:t>。</a:t>
-            </a:r>
-            <a:endParaRPr lang="zh-CN" altLang="en-US" sz="1200" dirty="0">
-              <a:ea typeface="SimSun" panose="02010600030101010101" pitchFamily="2" charset="-122"/>
-            </a:endParaRPr>
-          </a:p>
-          <a:p>
-            <a:pPr marL="0" indent="0">
-              <a:buNone/>
+              <a:rPr lang="en-US" altLang="zh-CN"/>
+              <a:t>Distance normalized: The initial value set to 1 and the current value calculated as d</a:t>
+            </a:r>
+            <a:r>
+              <a:rPr lang="en-US" altLang="en-US"/>
+              <a:t>ₜ/</a:t>
+            </a:r>
+            <a:r>
+              <a:rPr lang="en-US" altLang="zh-CN"/>
+              <a:t>d₀.</a:t>
+            </a:r>
+            <a:endParaRPr lang="en-US" altLang="zh-CN"/>
+          </a:p>
+          <a:p>
+            <a:pPr marL="171450" indent="-171450">
+              <a:lnSpc>
+                <a:spcPct val="140000"/>
+              </a:lnSpc>
+              <a:buFont typeface="Arial" panose="020B0604020202020204" pitchFamily="34" charset="0"/>
+              <a:buChar char="•"/>
             </a:pPr>
             <a:r>
-              <a:rPr lang="zh-CN" altLang="en-US" sz="1200" dirty="0">
-                <a:ea typeface="SimSun" panose="02010600030101010101" pitchFamily="2" charset="-122"/>
-              </a:rPr>
-              <a:t>每组抓取速度并不统一，抓取时间区间在</a:t>
-            </a:r>
-            <a:r>
-              <a:rPr lang="en-US" altLang="zh-CN" sz="1200" dirty="0">
-                <a:ea typeface="SimSun" panose="02010600030101010101" pitchFamily="2" charset="-122"/>
-              </a:rPr>
-              <a:t>1-3s</a:t>
-            </a:r>
-            <a:r>
-              <a:rPr lang="zh-CN" altLang="en-US" sz="1200" dirty="0">
-                <a:ea typeface="SimSun" panose="02010600030101010101" pitchFamily="2" charset="-122"/>
-              </a:rPr>
-              <a:t>。</a:t>
-            </a:r>
-            <a:endParaRPr lang="zh-CN" altLang="en-US" sz="1200" dirty="0">
-              <a:ea typeface="SimSun" panose="02010600030101010101" pitchFamily="2" charset="-122"/>
-            </a:endParaRPr>
+              <a:rPr lang="en-US" altLang="zh-CN"/>
+              <a:t>Grasping speed varied: Grasping durations ranging from 1 to 3 seconds.</a:t>
+            </a:r>
+            <a:endParaRPr lang="en-US" altLang="zh-CN"/>
+          </a:p>
+          <a:p>
+            <a:pPr marL="171450" indent="-171450">
+              <a:lnSpc>
+                <a:spcPct val="140000"/>
+              </a:lnSpc>
+              <a:buFont typeface="Arial" panose="020B0604020202020204" pitchFamily="34" charset="0"/>
+              <a:buChar char="•"/>
+            </a:pPr>
+            <a:r>
+              <a:rPr lang="en-US" altLang="zh-CN"/>
+              <a:t>Px to mm: mm = px / conversion factor (determined through prior measurements). </a:t>
+            </a:r>
+            <a:endParaRPr lang="en-US" altLang="zh-CN"/>
+          </a:p>
+          <a:p>
+            <a:pPr marL="171450" indent="-171450">
+              <a:lnSpc>
+                <a:spcPct val="140000"/>
+              </a:lnSpc>
+              <a:buFont typeface="Arial" panose="020B0604020202020204" pitchFamily="34" charset="0"/>
+              <a:buChar char="•"/>
+            </a:pPr>
+            <a:r>
+              <a:rPr lang="en-US" altLang="zh-CN"/>
+              <a:t>Base of the index finger was set as the hand point.</a:t>
+            </a:r>
+            <a:endParaRPr lang="en-US" altLang="zh-CN"/>
           </a:p>
         </p:txBody>
       </p:sp>
@@ -5369,63 +5397,6 @@
       </p:sp>
       <p:sp>
         <p:nvSpPr>
-          <p:cNvPr id="10" name="text_261"/>
-          <p:cNvSpPr txBox="1"/>
-          <p:nvPr/>
-        </p:nvSpPr>
-        <p:spPr>
-          <a:xfrm>
-            <a:off x="295275" y="5377815"/>
-            <a:ext cx="8229600" cy="731520"/>
-          </a:xfrm>
-          <a:prstGeom prst="rect">
-            <a:avLst/>
-          </a:prstGeom>
-          <a:noFill/>
-        </p:spPr>
-        <p:txBody>
-          <a:bodyPr wrap="square" lIns="635" tIns="635" rIns="635" bIns="635" rtlCol="0" anchor="t"/>
-          <a:lstStyle/>
-          <a:p>
-            <a:pPr marL="0" indent="0">
-              <a:buNone/>
-            </a:pPr>
-            <a:r>
-              <a:rPr lang="zh-CN" altLang="en-US"/>
-              <a:t>距离处理：初始点设为了</a:t>
-            </a:r>
-            <a:r>
-              <a:rPr lang="en-US" altLang="zh-CN"/>
-              <a:t>1</a:t>
-            </a:r>
-            <a:r>
-              <a:rPr lang="zh-CN" altLang="en-US">
-                <a:ea typeface="SimSun" panose="02010600030101010101" pitchFamily="2" charset="-122"/>
-              </a:rPr>
-              <a:t>。</a:t>
-            </a:r>
-            <a:endParaRPr lang="zh-CN" altLang="en-US">
-              <a:ea typeface="SimSun" panose="02010600030101010101" pitchFamily="2" charset="-122"/>
-            </a:endParaRPr>
-          </a:p>
-          <a:p>
-            <a:pPr marL="0" indent="0">
-              <a:buNone/>
-            </a:pPr>
-            <a:r>
-              <a:rPr lang="zh-CN" altLang="en-US">
-                <a:ea typeface="SimSun" panose="02010600030101010101" pitchFamily="2" charset="-122"/>
-              </a:rPr>
-              <a:t>将食指根部设为手的点计算距离。</a:t>
-            </a:r>
-            <a:endParaRPr lang="zh-CN" altLang="en-US">
-              <a:ea typeface="SimSun" panose="02010600030101010101" pitchFamily="2" charset="-122"/>
-            </a:endParaRPr>
-          </a:p>
-        </p:txBody>
-      </p:sp>
-      <p:sp>
-        <p:nvSpPr>
           <p:cNvPr id="25" name="Slide Number Placeholder 0"/>
           <p:cNvSpPr>
             <a:spLocks noGrp="1"/>
@@ -5487,8 +5458,8 @@
         </p:blipFill>
         <p:spPr>
           <a:xfrm>
-            <a:off x="635" y="1548765"/>
-            <a:ext cx="2947035" cy="3352165"/>
+            <a:off x="635" y="1372870"/>
+            <a:ext cx="3056255" cy="3352165"/>
           </a:xfrm>
           <a:prstGeom prst="rect">
             <a:avLst/>
@@ -5515,8 +5486,8 @@
         </p:blipFill>
         <p:spPr>
           <a:xfrm>
-            <a:off x="3098165" y="1463040"/>
-            <a:ext cx="2947035" cy="3463925"/>
+            <a:off x="3098165" y="1287145"/>
+            <a:ext cx="3097530" cy="3463925"/>
           </a:xfrm>
           <a:prstGeom prst="rect">
             <a:avLst/>
@@ -5544,8 +5515,8 @@
         </p:blipFill>
         <p:spPr>
           <a:xfrm>
-            <a:off x="6196330" y="1439545"/>
-            <a:ext cx="2947035" cy="3460750"/>
+            <a:off x="6195695" y="1263650"/>
+            <a:ext cx="2947670" cy="3460750"/>
           </a:xfrm>
           <a:prstGeom prst="rect">
             <a:avLst/>
@@ -5564,7 +5535,7 @@
         </p:nvSpPr>
         <p:spPr>
           <a:xfrm>
-            <a:off x="151130" y="1236980"/>
+            <a:off x="151130" y="1061085"/>
             <a:ext cx="2947035" cy="368300"/>
           </a:xfrm>
           <a:prstGeom prst="rect">
@@ -5580,18 +5551,8 @@
           <a:p>
             <a:pPr algn="ctr"/>
             <a:r>
-              <a:rPr sz="1800" b="1">
-                <a:solidFill>
-                  <a:srgbClr val="123049"/>
-                </a:solidFill>
-              </a:rPr>
               <a:t>20 mm</a:t>
             </a:r>
-            <a:endParaRPr sz="1800" b="1">
-              <a:solidFill>
-                <a:srgbClr val="123049"/>
-              </a:solidFill>
-            </a:endParaRPr>
           </a:p>
         </p:txBody>
       </p:sp>
@@ -5607,7 +5568,7 @@
         </p:nvSpPr>
         <p:spPr>
           <a:xfrm>
-            <a:off x="3248660" y="1236980"/>
+            <a:off x="3248660" y="1061085"/>
             <a:ext cx="2947035" cy="368300"/>
           </a:xfrm>
           <a:prstGeom prst="rect">
@@ -5623,18 +5584,8 @@
           <a:p>
             <a:pPr algn="ctr"/>
             <a:r>
-              <a:rPr sz="1800" b="1">
-                <a:solidFill>
-                  <a:srgbClr val="123049"/>
-                </a:solidFill>
-              </a:rPr>
               <a:t>30 mm</a:t>
             </a:r>
-            <a:endParaRPr sz="1800" b="1">
-              <a:solidFill>
-                <a:srgbClr val="123049"/>
-              </a:solidFill>
-            </a:endParaRPr>
           </a:p>
         </p:txBody>
       </p:sp>
@@ -5650,7 +5601,7 @@
         </p:nvSpPr>
         <p:spPr>
           <a:xfrm>
-            <a:off x="6345555" y="1236980"/>
+            <a:off x="6345555" y="1061085"/>
             <a:ext cx="2947035" cy="368300"/>
           </a:xfrm>
           <a:prstGeom prst="rect">
@@ -5666,18 +5617,8 @@
           <a:p>
             <a:pPr algn="ctr"/>
             <a:r>
-              <a:rPr sz="1800" b="1">
-                <a:solidFill>
-                  <a:srgbClr val="123049"/>
-                </a:solidFill>
-              </a:rPr>
               <a:t>40 mm</a:t>
             </a:r>
-            <a:endParaRPr sz="1800" b="1">
-              <a:solidFill>
-                <a:srgbClr val="123049"/>
-              </a:solidFill>
-            </a:endParaRPr>
           </a:p>
         </p:txBody>
       </p:sp>
@@ -5689,7 +5630,7 @@
         </p:nvSpPr>
         <p:spPr>
           <a:xfrm>
-            <a:off x="295275" y="4845685"/>
+            <a:off x="295275" y="4724400"/>
             <a:ext cx="8229600" cy="411480"/>
           </a:xfrm>
           <a:prstGeom prst="rect">
@@ -5705,17 +5646,67 @@
               <a:buNone/>
             </a:pPr>
             <a:r>
-              <a:rPr lang="en-US" sz="1700" b="1" dirty="0">
+              <a:rPr lang="en-US" sz="2000" b="1">
                 <a:solidFill>
-                  <a:schemeClr val="tx2"/>
+                  <a:srgbClr val="0070C0"/>
                 </a:solidFill>
-                <a:latin typeface="Meiryo UI" panose="020B0604030504040204" charset="-128"/>
-                <a:ea typeface="Meiryo UI" panose="020B0604030504040204" pitchFamily="34" charset="-122"/>
-                <a:cs typeface="Meiryo UI" panose="020B0604030504040204" pitchFamily="34" charset="-120"/>
               </a:rPr>
-              <a:t>考察の観点</a:t>
-            </a:r>
-            <a:endParaRPr lang="en-US" sz="1700" dirty="0"/>
+              <a:t>Analyze</a:t>
+            </a:r>
+            <a:r>
+              <a:rPr lang="zh-CN" altLang="en-US" sz="2000" b="1">
+                <a:solidFill>
+                  <a:srgbClr val="0070C0"/>
+                </a:solidFill>
+              </a:rPr>
+              <a:t>：</a:t>
+            </a:r>
+            <a:endParaRPr lang="zh-CN" altLang="en-US" sz="2000" b="1">
+              <a:solidFill>
+                <a:srgbClr val="0070C0"/>
+              </a:solidFill>
+            </a:endParaRPr>
+          </a:p>
+        </p:txBody>
+      </p:sp>
+      <p:sp>
+        <p:nvSpPr>
+          <p:cNvPr id="9" name="文本框 8"/>
+          <p:cNvSpPr txBox="1"/>
+          <p:nvPr/>
+        </p:nvSpPr>
+        <p:spPr>
+          <a:xfrm>
+            <a:off x="273685" y="5092065"/>
+            <a:ext cx="8251190" cy="914400"/>
+          </a:xfrm>
+          <a:prstGeom prst="rect">
+            <a:avLst/>
+          </a:prstGeom>
+          <a:noFill/>
+          <a:ln w="12700">
+            <a:noFill/>
+            <a:prstDash val="dash"/>
+          </a:ln>
+        </p:spPr>
+        <p:txBody>
+          <a:bodyPr wrap="square" lIns="25400" tIns="76200" rIns="76200" bIns="25400" rtlCol="0" anchor="t" anchorCtr="0"/>
+          <a:p>
+            <a:pPr marL="0" indent="0">
+              <a:lnSpc>
+                <a:spcPct val="140000"/>
+              </a:lnSpc>
+              <a:buNone/>
+            </a:pPr>
+            <a:r>
+              <a:rPr lang="zh-CN" altLang="en-US" sz="1200" dirty="0">
+                <a:ea typeface="宋体" panose="02010600030101010101" pitchFamily="2" charset="-122"/>
+              </a:rPr>
+              <a:t>时序信息对预测的提升，体现在手部开合大幅变化（张开与关闭）的阶段，可以看到红色区域，当手部闭合时，不能处理时序信息的模型的手部开合会急速下降，而有着完整历史信息的模型则与原趋势贴合。</a:t>
+            </a:r>
+            <a:endParaRPr lang="zh-CN" altLang="en-US" sz="1200" dirty="0">
+              <a:ea typeface="宋体" panose="02010600030101010101" pitchFamily="2" charset="-122"/>
+            </a:endParaRPr>
           </a:p>
         </p:txBody>
       </p:sp>
@@ -5729,23 +5720,65 @@
 
 <file path=ppt/tags/tag1.xml><?xml version="1.0" encoding="utf-8"?>
 <p:tagLst xmlns:p="http://schemas.openxmlformats.org/presentationml/2006/main">
-  <p:tag name="KSO_WM_DIAGRAM_VIRTUALLY_FRAME" val="{&quot;height&quot;:223.9,&quot;left&quot;:-9.9,&quot;top&quot;:258.3,&quot;width&quot;:784.05}"/>
+  <p:tag name="KSO_WM_DIAGRAM_VIRTUALLY_FRAME" val="{&quot;height&quot;:315.3,&quot;left&quot;:1.45,&quot;top&quot;:73.5,&quot;width&quot;:720}"/>
 </p:tagLst>
 </file>
 
 <file path=ppt/tags/tag10.xml><?xml version="1.0" encoding="utf-8"?>
 <p:tagLst xmlns:p="http://schemas.openxmlformats.org/presentationml/2006/main">
-  <p:tag name="KSO_WM_DIAGRAM_VIRTUALLY_FRAME" val="{&quot;height&quot;:365.85,&quot;left&quot;:0.05,&quot;top&quot;:79.2,&quot;width&quot;:731.65}"/>
+  <p:tag name="KSO_WM_DIAGRAM_VIRTUALLY_FRAME" val="{&quot;height&quot;:223.9,&quot;left&quot;:-9.9,&quot;top&quot;:258.3,&quot;width&quot;:784.05}"/>
 </p:tagLst>
 </file>
 
 <file path=ppt/tags/tag11.xml><?xml version="1.0" encoding="utf-8"?>
 <p:tagLst xmlns:p="http://schemas.openxmlformats.org/presentationml/2006/main">
+  <p:tag name="KSO_WM_DIAGRAM_VIRTUALLY_FRAME" val="{&quot;height&quot;:223.9,&quot;left&quot;:-9.9,&quot;top&quot;:258.3,&quot;width&quot;:784.05}"/>
+</p:tagLst>
+</file>
+
+<file path=ppt/tags/tag12.xml><?xml version="1.0" encoding="utf-8"?>
+<p:tagLst xmlns:p="http://schemas.openxmlformats.org/presentationml/2006/main">
+  <p:tag name="KSO_WM_DIAGRAM_VIRTUALLY_FRAME" val="{&quot;height&quot;:223.9,&quot;left&quot;:-9.9,&quot;top&quot;:258.3,&quot;width&quot;:784.05}"/>
+</p:tagLst>
+</file>
+
+<file path=ppt/tags/tag13.xml><?xml version="1.0" encoding="utf-8"?>
+<p:tagLst xmlns:p="http://schemas.openxmlformats.org/presentationml/2006/main">
+  <p:tag name="KSO_WM_DIAGRAM_VIRTUALLY_FRAME" val="{&quot;height&quot;:223.9,&quot;left&quot;:-9.9,&quot;top&quot;:258.3,&quot;width&quot;:784.05}"/>
+</p:tagLst>
+</file>
+
+<file path=ppt/tags/tag14.xml><?xml version="1.0" encoding="utf-8"?>
+<p:tagLst xmlns:p="http://schemas.openxmlformats.org/presentationml/2006/main">
   <p:tag name="KSO_WM_DIAGRAM_VIRTUALLY_FRAME" val="{&quot;height&quot;:365.85,&quot;left&quot;:0.05,&quot;top&quot;:79.2,&quot;width&quot;:731.65}"/>
 </p:tagLst>
 </file>
 
-<file path=ppt/tags/tag12.xml><?xml version="1.0" encoding="utf-8"?>
+<file path=ppt/tags/tag15.xml><?xml version="1.0" encoding="utf-8"?>
+<p:tagLst xmlns:p="http://schemas.openxmlformats.org/presentationml/2006/main">
+  <p:tag name="KSO_WM_DIAGRAM_VIRTUALLY_FRAME" val="{&quot;height&quot;:365.85,&quot;left&quot;:0.05,&quot;top&quot;:79.2,&quot;width&quot;:731.65}"/>
+</p:tagLst>
+</file>
+
+<file path=ppt/tags/tag16.xml><?xml version="1.0" encoding="utf-8"?>
+<p:tagLst xmlns:p="http://schemas.openxmlformats.org/presentationml/2006/main">
+  <p:tag name="KSO_WM_DIAGRAM_VIRTUALLY_FRAME" val="{&quot;height&quot;:365.85,&quot;left&quot;:0.05,&quot;top&quot;:79.2,&quot;width&quot;:731.65}"/>
+</p:tagLst>
+</file>
+
+<file path=ppt/tags/tag17.xml><?xml version="1.0" encoding="utf-8"?>
+<p:tagLst xmlns:p="http://schemas.openxmlformats.org/presentationml/2006/main">
+  <p:tag name="KSO_WM_DIAGRAM_VIRTUALLY_FRAME" val="{&quot;height&quot;:365.85,&quot;left&quot;:0.05,&quot;top&quot;:79.2,&quot;width&quot;:731.65}"/>
+</p:tagLst>
+</file>
+
+<file path=ppt/tags/tag18.xml><?xml version="1.0" encoding="utf-8"?>
+<p:tagLst xmlns:p="http://schemas.openxmlformats.org/presentationml/2006/main">
+  <p:tag name="KSO_WM_DIAGRAM_VIRTUALLY_FRAME" val="{&quot;height&quot;:365.85,&quot;left&quot;:0.05,&quot;top&quot;:79.2,&quot;width&quot;:731.65}"/>
+</p:tagLst>
+</file>
+
+<file path=ppt/tags/tag19.xml><?xml version="1.0" encoding="utf-8"?>
 <p:tagLst xmlns:p="http://schemas.openxmlformats.org/presentationml/2006/main">
   <p:tag name="KSO_WM_DIAGRAM_VIRTUALLY_FRAME" val="{&quot;height&quot;:365.85,&quot;left&quot;:0.05,&quot;top&quot;:79.2,&quot;width&quot;:731.65}"/>
 </p:tagLst>
@@ -5753,49 +5786,49 @@
 
 <file path=ppt/tags/tag2.xml><?xml version="1.0" encoding="utf-8"?>
 <p:tagLst xmlns:p="http://schemas.openxmlformats.org/presentationml/2006/main">
-  <p:tag name="KSO_WM_DIAGRAM_VIRTUALLY_FRAME" val="{&quot;height&quot;:223.9,&quot;left&quot;:-9.9,&quot;top&quot;:258.3,&quot;width&quot;:784.05}"/>
+  <p:tag name="KSO_WM_DIAGRAM_VIRTUALLY_FRAME" val="{&quot;height&quot;:315.3,&quot;left&quot;:1.45,&quot;top&quot;:73.5,&quot;width&quot;:720}"/>
 </p:tagLst>
 </file>
 
 <file path=ppt/tags/tag3.xml><?xml version="1.0" encoding="utf-8"?>
 <p:tagLst xmlns:p="http://schemas.openxmlformats.org/presentationml/2006/main">
-  <p:tag name="KSO_WM_DIAGRAM_VIRTUALLY_FRAME" val="{&quot;height&quot;:223.9,&quot;left&quot;:-9.9,&quot;top&quot;:258.3,&quot;width&quot;:784.05}"/>
+  <p:tag name="KSO_WM_DIAGRAM_VIRTUALLY_FRAME" val="{&quot;height&quot;:315.3,&quot;left&quot;:1.45,&quot;top&quot;:73.5,&quot;width&quot;:720}"/>
 </p:tagLst>
 </file>
 
 <file path=ppt/tags/tag4.xml><?xml version="1.0" encoding="utf-8"?>
 <p:tagLst xmlns:p="http://schemas.openxmlformats.org/presentationml/2006/main">
-  <p:tag name="KSO_WM_DIAGRAM_VIRTUALLY_FRAME" val="{&quot;height&quot;:223.9,&quot;left&quot;:-9.9,&quot;top&quot;:258.3,&quot;width&quot;:784.05}"/>
+  <p:tag name="KSO_WM_DIAGRAM_VIRTUALLY_FRAME" val="{&quot;height&quot;:315.3,&quot;left&quot;:1.45,&quot;top&quot;:73.5,&quot;width&quot;:720}"/>
 </p:tagLst>
 </file>
 
 <file path=ppt/tags/tag5.xml><?xml version="1.0" encoding="utf-8"?>
 <p:tagLst xmlns:p="http://schemas.openxmlformats.org/presentationml/2006/main">
-  <p:tag name="KSO_WM_DIAGRAM_VIRTUALLY_FRAME" val="{&quot;height&quot;:223.9,&quot;left&quot;:-9.9,&quot;top&quot;:258.3,&quot;width&quot;:784.05}"/>
+  <p:tag name="KSO_WM_DIAGRAM_VIRTUALLY_FRAME" val="{&quot;height&quot;:315.3,&quot;left&quot;:1.45,&quot;top&quot;:73.5,&quot;width&quot;:720}"/>
 </p:tagLst>
 </file>
 
 <file path=ppt/tags/tag6.xml><?xml version="1.0" encoding="utf-8"?>
 <p:tagLst xmlns:p="http://schemas.openxmlformats.org/presentationml/2006/main">
-  <p:tag name="KSO_WM_DIAGRAM_VIRTUALLY_FRAME" val="{&quot;height&quot;:223.9,&quot;left&quot;:-9.9,&quot;top&quot;:258.3,&quot;width&quot;:784.05}"/>
+  <p:tag name="KSO_WM_DIAGRAM_VIRTUALLY_FRAME" val="{&quot;height&quot;:315.3,&quot;left&quot;:1.45,&quot;top&quot;:73.5,&quot;width&quot;:720}"/>
 </p:tagLst>
 </file>
 
 <file path=ppt/tags/tag7.xml><?xml version="1.0" encoding="utf-8"?>
 <p:tagLst xmlns:p="http://schemas.openxmlformats.org/presentationml/2006/main">
-  <p:tag name="KSO_WM_DIAGRAM_VIRTUALLY_FRAME" val="{&quot;height&quot;:365.85,&quot;left&quot;:0.05,&quot;top&quot;:79.2,&quot;width&quot;:731.65}"/>
+  <p:tag name="KSO_WM_DIAGRAM_VIRTUALLY_FRAME" val="{&quot;height&quot;:315.3,&quot;left&quot;:1.45,&quot;top&quot;:73.5,&quot;width&quot;:720}"/>
 </p:tagLst>
 </file>
 
 <file path=ppt/tags/tag8.xml><?xml version="1.0" encoding="utf-8"?>
 <p:tagLst xmlns:p="http://schemas.openxmlformats.org/presentationml/2006/main">
-  <p:tag name="KSO_WM_DIAGRAM_VIRTUALLY_FRAME" val="{&quot;height&quot;:365.85,&quot;left&quot;:0.05,&quot;top&quot;:79.2,&quot;width&quot;:731.65}"/>
+  <p:tag name="KSO_WM_DIAGRAM_VIRTUALLY_FRAME" val="{&quot;height&quot;:223.9,&quot;left&quot;:-9.9,&quot;top&quot;:258.3,&quot;width&quot;:784.05}"/>
 </p:tagLst>
 </file>
 
 <file path=ppt/tags/tag9.xml><?xml version="1.0" encoding="utf-8"?>
 <p:tagLst xmlns:p="http://schemas.openxmlformats.org/presentationml/2006/main">
-  <p:tag name="KSO_WM_DIAGRAM_VIRTUALLY_FRAME" val="{&quot;height&quot;:365.85,&quot;left&quot;:0.05,&quot;top&quot;:79.2,&quot;width&quot;:731.65}"/>
+  <p:tag name="KSO_WM_DIAGRAM_VIRTUALLY_FRAME" val="{&quot;height&quot;:223.9,&quot;left&quot;:-9.9,&quot;top&quot;:258.3,&quot;width&quot;:784.05}"/>
 </p:tagLst>
 </file>
 
@@ -6050,6 +6083,29 @@
         </a:fontRef>
       </a:style>
     </a:lnDef>
+    <a:txDef>
+      <a:spPr>
+        <a:noFill/>
+        <a:ln w="12700">
+          <a:solidFill>
+            <a:schemeClr val="accent2"/>
+          </a:solidFill>
+          <a:prstDash val="dash"/>
+        </a:ln>
+      </a:spPr>
+      <a:bodyPr wrap="square" lIns="25400" tIns="76200" rIns="76200" bIns="25400" rtlCol="0" anchor="t" anchorCtr="0"/>
+      <a:lstStyle>
+        <a:defPPr marL="0" indent="0">
+          <a:lnSpc>
+            <a:spcPct val="140000"/>
+          </a:lnSpc>
+          <a:buNone/>
+          <a:defRPr lang="en-US" altLang="zh-CN" sz="1200" dirty="0">
+            <a:ea typeface="宋体" panose="02010600030101010101" pitchFamily="2" charset="-122"/>
+          </a:defRPr>
+        </a:defPPr>
+      </a:lstStyle>
+    </a:txDef>
   </a:objectDefaults>
   <a:extLst>
     <a:ext uri="{05A4C25C-085E-4340-85A3-A5531E510DB2}">
